--- a/docs/Cardia_Pitch_Deck.pptx
+++ b/docs/Cardia_Pitch_Deck.pptx
@@ -2902,27 +2902,6 @@
             </a:r>
             <a:endParaRPr lang="en-US" sz="1250" dirty="0"/>
           </a:p>
-          <a:p>
-            <a:pPr marL="342900" indent="-342900">
-              <a:spcAft>
-                <a:spcPts val="800"/>
-              </a:spcAft>
-              <a:buSzPct val="100000"/>
-              <a:buChar char="•"/>
-            </a:pPr>
-            <a:r>
-              <a:rPr lang="en-US" sz="1250" dirty="0">
-                <a:solidFill>
-                  <a:srgbClr val="44535C"/>
-                </a:solidFill>
-                <a:latin typeface="Calibri" pitchFamily="34" charset="0"/>
-                <a:ea typeface="Calibri" pitchFamily="34" charset="-122"/>
-                <a:cs typeface="Calibri" pitchFamily="34" charset="-120"/>
-              </a:rPr>
-              <a:t>Anthropic Claude  (optional AI)</a:t>
-            </a:r>
-            <a:endParaRPr lang="en-US" sz="1250" dirty="0"/>
-          </a:p>
         </p:txBody>
       </p:sp>
       <p:sp>
@@ -2958,7 +2937,7 @@
                 <a:ea typeface="Calibri" pitchFamily="34" charset="-122"/>
                 <a:cs typeface="Calibri" pitchFamily="34" charset="-120"/>
               </a:rPr>
-              <a:t>Scales to 100k+ users on the same architecture. The rules engine is free local compute; AI is the only variable cost, gated and cached.</a:t>
+              <a:t>Scales to 100k+ users on the same architecture. The clinical rules engine is free local compute, so there is no per-use cost to run a result.</a:t>
             </a:r>
             <a:endParaRPr lang="en-US" sz="1100" dirty="0"/>
           </a:p>
@@ -3168,7 +3147,7 @@
                             <a:srgbClr val="112430"/>
                           </a:solidFill>
                         </a:rPr>
-                        <a:t>Launch  (0 to 2k users)</a:t>
+                        <a:t>Launch  (free tiers)</a:t>
                       </a:r>
                       <a:endParaRPr lang="en-US" sz="1250" dirty="0"/>
                     </a:p>
@@ -3229,7 +3208,7 @@
                             <a:srgbClr val="2F7150"/>
                           </a:solidFill>
                         </a:rPr>
-                        <a:t>~$600 to 1,200</a:t>
+                        <a:t>~$15 to 50  (domain)</a:t>
                       </a:r>
                       <a:endParaRPr lang="en-US" sz="1250" dirty="0"/>
                     </a:p>
@@ -3292,7 +3271,7 @@
                             <a:srgbClr val="112430"/>
                           </a:solidFill>
                         </a:rPr>
-                        <a:t>Growth  (10 to 50k MAU)</a:t>
+                        <a:t>Growth  (paid tiers)</a:t>
                       </a:r>
                       <a:endParaRPr lang="en-US" sz="1250" dirty="0"/>
                     </a:p>
@@ -3353,7 +3332,7 @@
                             <a:srgbClr val="2F7150"/>
                           </a:solidFill>
                         </a:rPr>
-                        <a:t>~$2,000 to 8,000</a:t>
+                        <a:t>~$540 to 800</a:t>
                       </a:r>
                       <a:endParaRPr lang="en-US" sz="1250" dirty="0"/>
                     </a:p>
@@ -3414,7 +3393,7 @@
         <p:spPr>
           <a:xfrm>
             <a:off x="4343400" y="4023360"/>
-            <a:ext cx="4343400" cy="640080"/>
+            <a:ext cx="4343400" cy="731520"/>
           </a:xfrm>
           <a:prstGeom prst="rect">
             <a:avLst/>
@@ -3438,7 +3417,7 @@
                 <a:ea typeface="Calibri" pitchFamily="34" charset="-122"/>
                 <a:cs typeface="Calibri" pitchFamily="34" charset="-120"/>
               </a:rPr>
-              <a:t>Plus payment fees on revenue (2.9% + $0.30) and any marketing spend. A real product runs for under ~$1k/yr before scale.</a:t>
+              <a:t>Launches on Vercel and Supabase free tiers; you only pay for Pro tiers once revenue justifies it. Plus payment fees on revenue (2.9% + $0.30). The AI layer is out of scope, so it adds nothing to run cost.</a:t>
             </a:r>
             <a:endParaRPr lang="en-US" sz="1100" dirty="0"/>
           </a:p>
@@ -13562,7 +13541,7 @@
                 <a:ea typeface="Calibri" pitchFamily="34" charset="-122"/>
                 <a:cs typeface="Calibri" pitchFamily="34" charset="-120"/>
               </a:rPr>
-              <a:t>Rules engine, danger first UI, library, AI layer, deployed on Vercel + Supabase.</a:t>
+              <a:t>Rules engine, danger first UI, biomarker library, deployed on Vercel + Supabase.</a:t>
             </a:r>
             <a:endParaRPr lang="en-US" sz="1150" dirty="0"/>
           </a:p>
@@ -13755,7 +13734,7 @@
                 <a:ea typeface="Calibri" pitchFamily="34" charset="-122"/>
                 <a:cs typeface="Calibri" pitchFamily="34" charset="-120"/>
               </a:rPr>
-              <a:t>Accounts, Stripe billing, premium features (history, trends, PDF, AI on).</a:t>
+              <a:t>Accounts, Stripe billing, premium features (saved history, trends, doctor PDF).</a:t>
             </a:r>
             <a:endParaRPr lang="en-US" sz="1150" dirty="0"/>
           </a:p>

--- a/docs/Cardia_Pitch_Deck.pptx
+++ b/docs/Cardia_Pitch_Deck.pptx
@@ -3147,7 +3147,7 @@
                             <a:srgbClr val="112430"/>
                           </a:solidFill>
                         </a:rPr>
-                        <a:t>Launch  (free tiers)</a:t>
+                        <a:t>Launch  (0 to 2k users)</a:t>
                       </a:r>
                       <a:endParaRPr lang="en-US" sz="1250" dirty="0"/>
                     </a:p>
@@ -3208,7 +3208,7 @@
                             <a:srgbClr val="2F7150"/>
                           </a:solidFill>
                         </a:rPr>
-                        <a:t>~$15 to 50  (domain)</a:t>
+                        <a:t>~$555 to 650</a:t>
                       </a:r>
                       <a:endParaRPr lang="en-US" sz="1250" dirty="0"/>
                     </a:p>
@@ -3271,7 +3271,7 @@
                             <a:srgbClr val="112430"/>
                           </a:solidFill>
                         </a:rPr>
-                        <a:t>Growth  (paid tiers)</a:t>
+                        <a:t>Growth  (10 to 50k MAU)</a:t>
                       </a:r>
                       <a:endParaRPr lang="en-US" sz="1250" dirty="0"/>
                     </a:p>
@@ -3332,7 +3332,7 @@
                             <a:srgbClr val="2F7150"/>
                           </a:solidFill>
                         </a:rPr>
-                        <a:t>~$540 to 800</a:t>
+                        <a:t>~$1,000 to 2,400</a:t>
                       </a:r>
                       <a:endParaRPr lang="en-US" sz="1250" dirty="0"/>
                     </a:p>
@@ -3417,7 +3417,7 @@
                 <a:ea typeface="Calibri" pitchFamily="34" charset="-122"/>
                 <a:cs typeface="Calibri" pitchFamily="34" charset="-120"/>
               </a:rPr>
-              <a:t>Launches on Vercel and Supabase free tiers; you only pay for Pro tiers once revenue justifies it. Plus payment fees on revenue (2.9% + $0.30). The AI layer is out of scope, so it adds nothing to run cost.</a:t>
+              <a:t>Paid commercial tiers from day one (Vercel Pro + Supabase Pro), for the license, backups, and uptime a sellable product needs. Plus payment fees on revenue (2.9% + $0.30). The AI layer is out of scope, so it adds nothing to run cost.</a:t>
             </a:r>
             <a:endParaRPr lang="en-US" sz="1100" dirty="0"/>
           </a:p>
